--- a/deliverable/versions/中期答辩_B_极简线框.pptx
+++ b/deliverable/versions/中期答辩_B_极简线框.pptx
@@ -4699,8 +4699,8 @@
         </p:nvSpPr>
         <p:spPr>
           <a:xfrm>
-            <a:off x="566928" y="4315968"/>
-            <a:ext cx="11057839" cy="1463040"/>
+            <a:off x="566928" y="4224528"/>
+            <a:ext cx="11057839" cy="1737360"/>
           </a:xfrm>
           <a:prstGeom prst="rect">
             <a:avLst/>
@@ -4734,7 +4734,7 @@
                 <a:ea typeface="微软雅黑"/>
                 <a:cs typeface="Arial"/>
               </a:rPr>
-              <a:t>【姓名】　　学号：【学号】</a:t>
+              <a:t>文绍华　　学号：2024110316</a:t>
             </a:r>
           </a:p>
           <a:p>
@@ -4758,7 +4758,31 @@
                 <a:ea typeface="微软雅黑"/>
                 <a:cs typeface="Arial"/>
               </a:rPr>
-              <a:t>指导教师：【导师姓名】　　培养单位：【学院】</a:t>
+              <a:t>指导教师：申亮　　培养单位：生命科学学院</a:t>
+            </a:r>
+          </a:p>
+          <a:p>
+            <a:pPr algn="ctr">
+              <a:lnSpc>
+                <a:spcPct val="122000"/>
+              </a:lnSpc>
+              <a:spcBef>
+                <a:spcPts val="1000"/>
+              </a:spcBef>
+              <a:spcAft>
+                <a:spcPts val="0"/>
+              </a:spcAft>
+            </a:pPr>
+            <a:r>
+              <a:rPr sz="1700" b="0">
+                <a:solidFill>
+                  <a:srgbClr val="1A1F24"/>
+                </a:solidFill>
+                <a:latin typeface="Arial"/>
+                <a:ea typeface="微软雅黑"/>
+                <a:cs typeface="Arial"/>
+              </a:rPr>
+              <a:t>学科专业：生物学（生物化学与分子生物学）</a:t>
             </a:r>
           </a:p>
           <a:p>
@@ -7938,7 +7962,7 @@
                 <a:ea typeface="微软雅黑"/>
                 <a:cs typeface="Arial"/>
               </a:rPr>
-              <a:t>汇报人：【姓名】　指导教师：【导师姓名】</a:t>
+              <a:t>汇报人：文绍华　指导教师：申亮</a:t>
             </a:r>
           </a:p>
         </p:txBody>
